--- a/docs/playbooks/ui-design-system-slides.pptx
+++ b/docs/playbooks/ui-design-system-slides.pptx
@@ -5,7 +5,7 @@
     <p:sldMasterId id="2147483648" r:id="rId1"/>
   </p:sldMasterIdLst>
   <p:notesMasterIdLst>
-    <p:notesMasterId r:id="rId16"/>
+    <p:notesMasterId r:id="rId17"/>
   </p:notesMasterIdLst>
   <p:sldIdLst>
     <p:sldId id="256" r:id="rId2"/>
@@ -22,6 +22,7 @@
     <p:sldId id="267" r:id="rId13"/>
     <p:sldId id="268" r:id="rId14"/>
     <p:sldId id="269" r:id="rId15"/>
+    <p:sldId id="270" r:id="rId16"/>
   </p:sldIdLst>
   <p:sldSz cx="9144000" cy="5143500" type="screen16x9"/>
   <p:notesSz cx="6858000" cy="9144000"/>
@@ -633,7 +634,7 @@
             </a:pPr>
             <a:r>
               <a:rPr/>
-              <a:t>End here, deliberately. If the room takes one caveat away, make it this one.</a:t>
+              <a:t>Do not skip this slide because it is unflattering. It is the most persuasive slide in the deck for the ask on the previous one.</a:t>
             </a:r>
           </a:p>
           <a:p>
@@ -647,7 +648,7 @@
             </a:pPr>
             <a:r>
               <a:rPr/>
-              <a:t>Reading the source covers all 148 files exhaustively and reproducibly. Clicking through the application covers whatever a person remembers to click. We chose the first, and it has a precise blind spot, and item 3 on the previous slide is how we close it.</a:t>
+              <a:t>The nine silent ones are the point worth making aloud. An error that stops is cheap — you see it. A wrong colour that carries on is the expensive kind, and it is exactly the kind our static checks are worst at finding.</a:t>
             </a:r>
           </a:p>
           <a:p>
@@ -661,7 +662,7 @@
             </a:pPr>
             <a:r>
               <a:rPr/>
-              <a:t>Also say: nothing here is blocked by access or permission. There is no system we cannot reach and no privilege we do not hold. It is one person, a browser, and a week or two.</a:t>
+              <a:t>If someone asks why we did not catch it: a type check and a production build both passed too. This class of fault only exists at the moment the page runs.</a:t>
             </a:r>
           </a:p>
         </p:txBody>
@@ -743,6 +744,116 @@
             </a:pPr>
             <a:r>
               <a:rPr/>
+              <a:t>End here, deliberately. If the room takes one caveat away, make it this one.</a:t>
+            </a:r>
+          </a:p>
+          <a:p>
+            <a:pPr lvl="0" indent="0" marL="0">
+              <a:buNone/>
+            </a:pPr>
+          </a:p>
+          <a:p>
+            <a:pPr lvl="0" indent="0" marL="0">
+              <a:buNone/>
+            </a:pPr>
+            <a:r>
+              <a:rPr/>
+              <a:t>Reading the source covers all 148 files exhaustively and reproducibly. Clicking through the application covers whatever a person remembers to click. We chose the first, and it has a precise blind spot, and item 3 on the previous slide is how we close it.</a:t>
+            </a:r>
+          </a:p>
+          <a:p>
+            <a:pPr lvl="0" indent="0" marL="0">
+              <a:buNone/>
+            </a:pPr>
+          </a:p>
+          <a:p>
+            <a:pPr lvl="0" indent="0" marL="0">
+              <a:buNone/>
+            </a:pPr>
+            <a:r>
+              <a:rPr/>
+              <a:t>Also say: nothing here is blocked by access or permission. There is no system we cannot reach and no privilege we do not hold. It is one person, a browser, and a week or two.</a:t>
+            </a:r>
+          </a:p>
+        </p:txBody>
+      </p:sp>
+      <p:sp>
+        <p:nvSpPr>
+          <p:cNvPr id="4" name="Slide Number Placeholder 3"/>
+          <p:cNvSpPr>
+            <a:spLocks noGrp="1"/>
+          </p:cNvSpPr>
+          <p:nvPr>
+            <p:ph type="sldNum" sz="quarter" idx="10"/>
+          </p:nvPr>
+        </p:nvSpPr>
+        <p:spPr/>
+        <p:txBody>
+          <a:bodyPr/>
+          <a:lstStyle/>
+          <a:p>
+            <a:fld id="{18BDFEC3-8487-43E8-A154-7C12CBC1FFF2}" type="slidenum">
+              <a:rPr lang="en-US"/>
+              <a:t>14</a:t>
+            </a:fld>
+            <a:endParaRPr lang="en-US"/>
+          </a:p>
+        </p:txBody>
+      </p:sp>
+    </p:spTree>
+  </p:cSld>
+</p:notes>
+</file>
+
+<file path=ppt/notesSlides/notesSlide12.xml><?xml version="1.0" encoding="utf-8"?>
+<p:notes xmlns:a="http://schemas.openxmlformats.org/drawingml/2006/main" xmlns:r="http://schemas.openxmlformats.org/officeDocument/2006/relationships" xmlns:p="http://schemas.openxmlformats.org/presentationml/2006/main">
+  <p:cSld>
+    <p:spTree>
+      <p:nvGrpSpPr>
+        <p:cNvPr id="1" name=""/>
+        <p:cNvGrpSpPr/>
+        <p:nvPr/>
+      </p:nvGrpSpPr>
+      <p:grpSpPr>
+        <a:xfrm>
+          <a:off x="0" y="0"/>
+          <a:ext cx="0" cy="0"/>
+          <a:chOff x="0" y="0"/>
+          <a:chExt cx="0" cy="0"/>
+        </a:xfrm>
+      </p:grpSpPr>
+      <p:sp>
+        <p:nvSpPr>
+          <p:cNvPr id="2" name="Slide Image Placeholder 1"/>
+          <p:cNvSpPr>
+            <a:spLocks noGrp="1" noRot="1" noChangeAspect="1"/>
+          </p:cNvSpPr>
+          <p:nvPr>
+            <p:ph type="sldImg"/>
+          </p:nvPr>
+        </p:nvSpPr>
+        <p:spPr/>
+      </p:sp>
+      <p:sp>
+        <p:nvSpPr>
+          <p:cNvPr id="3" name="Notes Placeholder 2"/>
+          <p:cNvSpPr>
+            <a:spLocks noGrp="1"/>
+          </p:cNvSpPr>
+          <p:nvPr>
+            <p:ph type="body" idx="1"/>
+          </p:nvPr>
+        </p:nvSpPr>
+        <p:spPr/>
+        <p:txBody>
+          <a:bodyPr/>
+          <a:lstStyle/>
+          <a:p>
+            <a:pPr lvl="0" indent="0" marL="0">
+              <a:buNone/>
+            </a:pPr>
+            <a:r>
+              <a:rPr/>
               <a:t>Offer the last line to anyone who wants to check the numbers rather than trust them. It runs in under a minute and prints both columns of the before/after table.</a:t>
             </a:r>
           </a:p>
@@ -765,7 +876,7 @@
           <a:p>
             <a:fld id="{18BDFEC3-8487-43E8-A154-7C12CBC1FFF2}" type="slidenum">
               <a:rPr lang="en-US"/>
-              <a:t>14</a:t>
+              <a:t>15</a:t>
             </a:fld>
             <a:endParaRPr lang="en-US"/>
           </a:p>
@@ -5001,7 +5112,7 @@
                       </a:pPr>
                       <a:r>
                         <a:rPr b="1"/>
-                        <a:t>2,257</a:t>
+                        <a:t>2,284</a:t>
                       </a:r>
                     </a:p>
                   </a:txBody>
@@ -5410,7 +5521,7 @@
             </a:pPr>
             <a:r>
               <a:rPr/>
-              <a:t>What we are not claiming</a:t>
+              <a:t>Then we opened it, and it broke twice</a:t>
             </a:r>
           </a:p>
         </p:txBody>
@@ -5434,8 +5545,34 @@
               <a:buNone/>
             </a:pPr>
             <a:r>
+              <a:rPr/>
+              <a:t>Our checks said zero. A browser said otherwise, in under a minute.</a:t>
+            </a:r>
+          </a:p>
+          <a:p>
+            <a:pPr lvl="0"/>
+            <a:r>
               <a:rPr b="1"/>
-              <a:t>No browser was opened.</a:t>
+              <a:t>Navigation menu</a:t>
+            </a:r>
+            <a:r>
+              <a:rPr/>
+              <a:t> — three groups accidentally sharing one internal name</a:t>
+            </a:r>
+          </a:p>
+          <a:p>
+            <a:pPr lvl="0"/>
+            <a:r>
+              <a:rPr b="1"/>
+              <a:t>Dashboard radar graphic</a:t>
+            </a:r>
+            <a:r>
+              <a:rPr/>
+              <a:t> — 4 places stopped with an error, </a:t>
+            </a:r>
+            <a:r>
+              <a:rPr b="1"/>
+              <a:t>9 more silently painted the wrong colour</a:t>
             </a:r>
           </a:p>
           <a:p>
@@ -5444,54 +5581,15 @@
             </a:pPr>
             <a:r>
               <a:rPr/>
-              <a:t>Everything was measured by reading the source code, not by running the application.</a:t>
-            </a:r>
-          </a:p>
-          <a:p>
-            <a:pPr lvl="0"/>
-            <a:r>
-              <a:rPr/>
-              <a:t>We </a:t>
+              <a:t>Both fixed. The second is now covered by a </a:t>
             </a:r>
             <a:r>
               <a:rPr b="1"/>
-              <a:t>can</a:t>
-            </a:r>
-            <a:r>
-              <a:rPr/>
-              <a:t> prove no instruction in the code causes a page to be too wide for a phone</a:t>
-            </a:r>
-          </a:p>
-          <a:p>
-            <a:pPr lvl="0"/>
-            <a:r>
-              <a:rPr/>
-              <a:t>We </a:t>
-            </a:r>
-            <a:r>
-              <a:rPr b="1"/>
-              <a:t>cannot</a:t>
-            </a:r>
-            <a:r>
-              <a:rPr/>
-              <a:t> prove no page is too wide for a phone</a:t>
-            </a:r>
-          </a:p>
-          <a:p>
-            <a:pPr lvl="0" indent="0" marL="0">
-              <a:buNone/>
-            </a:pPr>
-            <a:r>
-              <a:rPr/>
-              <a:t>Those are different statements. “Zero findings” means </a:t>
-            </a:r>
-            <a:r>
-              <a:rPr b="1"/>
-              <a:t>zero findings our checks can see</a:t>
-            </a:r>
-            <a:r>
-              <a:rPr/>
-              <a:t> — not zero defects.</a:t>
+              <a:t>13th automatic check</a:t>
+            </a:r>
+            <a:r>
+              <a:rPr/>
+              <a:t> — 27 problems against the broken version, 0 against the fixed one.</a:t>
             </a:r>
           </a:p>
         </p:txBody>
@@ -5502,6 +5600,134 @@
 </file>
 
 <file path=ppt/slides/slide14.xml><?xml version="1.0" encoding="utf-8"?>
+<p:sld xmlns:a="http://schemas.openxmlformats.org/drawingml/2006/main" xmlns:r="http://schemas.openxmlformats.org/officeDocument/2006/relationships" xmlns:p="http://schemas.openxmlformats.org/presentationml/2006/main">
+  <p:cSld>
+    <p:spTree>
+      <p:nvGrpSpPr>
+        <p:cNvPr id="1" name=""/>
+        <p:cNvGrpSpPr/>
+        <p:nvPr/>
+      </p:nvGrpSpPr>
+      <p:grpSpPr>
+        <a:xfrm>
+          <a:off x="0" y="0"/>
+          <a:ext cx="0" cy="0"/>
+          <a:chOff x="0" y="0"/>
+          <a:chExt cx="0" cy="0"/>
+        </a:xfrm>
+      </p:grpSpPr>
+      <p:sp>
+        <p:nvSpPr>
+          <p:cNvPr id="2" name="Title 1"/>
+          <p:cNvSpPr>
+            <a:spLocks noGrp="1"/>
+          </p:cNvSpPr>
+          <p:nvPr>
+            <p:ph type="title"/>
+          </p:nvPr>
+        </p:nvSpPr>
+        <p:spPr/>
+        <p:txBody>
+          <a:bodyPr/>
+          <a:lstStyle/>
+          <a:p>
+            <a:pPr lvl="0" indent="0" marL="0">
+              <a:buNone/>
+            </a:pPr>
+            <a:r>
+              <a:rPr/>
+              <a:t>What we are not claiming</a:t>
+            </a:r>
+          </a:p>
+        </p:txBody>
+      </p:sp>
+      <p:sp>
+        <p:nvSpPr>
+          <p:cNvPr id="3" name="Content Placeholder 2"/>
+          <p:cNvSpPr>
+            <a:spLocks noGrp="1"/>
+          </p:cNvSpPr>
+          <p:nvPr>
+            <p:ph idx="1"/>
+          </p:nvPr>
+        </p:nvSpPr>
+        <p:spPr/>
+        <p:txBody>
+          <a:bodyPr/>
+          <a:lstStyle/>
+          <a:p>
+            <a:pPr lvl="0" indent="0" marL="0">
+              <a:buNone/>
+            </a:pPr>
+            <a:r>
+              <a:rPr b="1"/>
+              <a:t>The measurement work was done without a browser.</a:t>
+            </a:r>
+          </a:p>
+          <a:p>
+            <a:pPr lvl="0" indent="0" marL="0">
+              <a:buNone/>
+            </a:pPr>
+            <a:r>
+              <a:rPr/>
+              <a:t>Everything was measured by reading the source code, not by running the application.</a:t>
+            </a:r>
+          </a:p>
+          <a:p>
+            <a:pPr lvl="0"/>
+            <a:r>
+              <a:rPr/>
+              <a:t>We </a:t>
+            </a:r>
+            <a:r>
+              <a:rPr b="1"/>
+              <a:t>can</a:t>
+            </a:r>
+            <a:r>
+              <a:rPr/>
+              <a:t> prove no instruction in the code causes a page to be too wide for a phone</a:t>
+            </a:r>
+          </a:p>
+          <a:p>
+            <a:pPr lvl="0"/>
+            <a:r>
+              <a:rPr/>
+              <a:t>We </a:t>
+            </a:r>
+            <a:r>
+              <a:rPr b="1"/>
+              <a:t>cannot</a:t>
+            </a:r>
+            <a:r>
+              <a:rPr/>
+              <a:t> prove no page is too wide for a phone</a:t>
+            </a:r>
+          </a:p>
+          <a:p>
+            <a:pPr lvl="0" indent="0" marL="0">
+              <a:buNone/>
+            </a:pPr>
+            <a:r>
+              <a:rPr/>
+              <a:t>Those are different statements. “Zero findings” means </a:t>
+            </a:r>
+            <a:r>
+              <a:rPr b="1"/>
+              <a:t>zero findings our checks can see</a:t>
+            </a:r>
+            <a:r>
+              <a:rPr/>
+              <a:t> — not zero defects.</a:t>
+            </a:r>
+          </a:p>
+        </p:txBody>
+      </p:sp>
+    </p:spTree>
+  </p:cSld>
+</p:sld>
+</file>
+
+<file path=ppt/slides/slide15.xml><?xml version="1.0" encoding="utf-8"?>
 <p:sld xmlns:a="http://schemas.openxmlformats.org/drawingml/2006/main" xmlns:r="http://schemas.openxmlformats.org/officeDocument/2006/relationships" xmlns:p="http://schemas.openxmlformats.org/presentationml/2006/main">
   <p:cSld>
     <p:spTree>
